--- a/Viernes-12/S01_Viernes-12_1_Carrusel_5-documentos-que-necesitaras_4x5.pptx
+++ b/Viernes-12/S01_Viernes-12_1_Carrusel_5-documentos-que-necesitaras_4x5.pptx
@@ -4035,7 +4035,7 @@
         <p:spPr>
           <a:xfrm>
             <a:off x="777240" y="1737360"/>
-            <a:ext cx="6675120" cy="7595108"/>
+            <a:ext cx="6675120" cy="6134608"/>
           </a:xfrm>
           <a:prstGeom prst="rect">
             <a:avLst/>
@@ -4060,7 +4060,7 @@
                 </a:solidFill>
                 <a:latin typeface="Inter"/>
               </a:rPr>
-              <a:t>Guárdalo para cuando te toque.</a:t>
+              <a:t>Todos, en línea y visados.</a:t>
             </a:r>
           </a:p>
         </p:txBody>
@@ -4068,6 +4068,45 @@
       <p:sp>
         <p:nvSpPr>
           <p:cNvPr id="7" name="TextBox 6"/>
+          <p:cNvSpPr txBox="1"/>
+          <p:nvPr/>
+        </p:nvSpPr>
+        <p:spPr>
+          <a:xfrm>
+            <a:off x="777240" y="7521702"/>
+            <a:ext cx="6675120" cy="1530858"/>
+          </a:xfrm>
+          <a:prstGeom prst="rect">
+            <a:avLst/>
+          </a:prstGeom>
+          <a:noFill/>
+        </p:spPr>
+        <p:txBody>
+          <a:bodyPr wrap="square" anchor="t" lIns="0" rIns="0" tIns="0" bIns="0">
+            <a:spAutoFit/>
+          </a:bodyPr>
+          <a:lstStyle/>
+          <a:p>
+            <a:pPr algn="l">
+              <a:lnSpc>
+                <a:spcPct val="110000"/>
+              </a:lnSpc>
+            </a:pPr>
+            <a:r>
+              <a:rPr sz="2600" b="0">
+                <a:solidFill>
+                  <a:srgbClr val="FFFFFF"/>
+                </a:solidFill>
+                <a:latin typeface="Inter"/>
+              </a:rPr>
+              <a:t>Ya en early access: notaly.com.ve</a:t>
+            </a:r>
+          </a:p>
+        </p:txBody>
+      </p:sp>
+      <p:sp>
+        <p:nvSpPr>
+          <p:cNvPr id="8" name="TextBox 7"/>
           <p:cNvSpPr txBox="1"/>
           <p:nvPr/>
         </p:nvSpPr>

--- a/Viernes-12/S01_Viernes-12_1_Carrusel_5-documentos-que-necesitaras_4x5.pptx
+++ b/Viernes-12/S01_Viernes-12_1_Carrusel_5-documentos-que-necesitaras_4x5.pptx
@@ -4073,8 +4073,8 @@
         </p:nvSpPr>
         <p:spPr>
           <a:xfrm>
-            <a:off x="777240" y="7521702"/>
-            <a:ext cx="6675120" cy="1530858"/>
+            <a:off x="777240" y="7871968"/>
+            <a:ext cx="6675120" cy="1118108"/>
           </a:xfrm>
           <a:prstGeom prst="rect">
             <a:avLst/>
@@ -4099,7 +4099,7 @@
                 </a:solidFill>
                 <a:latin typeface="Inter"/>
               </a:rPr>
-              <a:t>Ya en early access: notaly.com.ve</a:t>
+              <a:t>Conócelos en notaly.com.ve</a:t>
             </a:r>
           </a:p>
         </p:txBody>

--- a/Viernes-12/S01_Viernes-12_1_Carrusel_5-documentos-que-necesitaras_4x5.pptx
+++ b/Viernes-12/S01_Viernes-12_1_Carrusel_5-documentos-que-necesitaras_4x5.pptx
@@ -3104,7 +3104,7 @@
       <p:grpSpPr/>
       <p:pic>
         <p:nvPicPr>
-          <p:cNvPr id="2" name="Picture 1" descr="oficina.png"/>
+          <p:cNvPr id="2" name="Picture 1" descr="familia.png"/>
           <p:cNvPicPr>
             <a:picLocks noChangeAspect="1"/>
           </p:cNvPicPr>
@@ -3118,8 +3118,8 @@
         </p:blipFill>
         <p:spPr>
           <a:xfrm>
-            <a:off x="0" y="-342900"/>
-            <a:ext cx="8229600" cy="10972800"/>
+            <a:off x="0" y="-2228850"/>
+            <a:ext cx="8229600" cy="14744700"/>
           </a:xfrm>
           <a:prstGeom prst="rect">
             <a:avLst/>
